--- a/slides/pptx/week09.pptx
+++ b/slides/pptx/week09.pptx
@@ -1213,7 +1213,7 @@
     <p:bg>
       <p:bgPr>
         <a:solidFill>
-          <a:srgbClr val="0E1726"/>
+          <a:srgbClr val="FFFFFF"/>
         </a:solidFill>
       </p:bgPr>
     </p:bg>
@@ -1231,38 +1231,9 @@
           <a:chExt cx="0" cy="0"/>
         </a:xfrm>
       </p:grpSpPr>
-      <p:sp>
-        <p:nvSpPr>
-          <p:cNvPr id="2" name="Shape 0"/>
-          <p:cNvSpPr/>
-          <p:nvPr/>
-        </p:nvSpPr>
-        <p:spPr>
-          <a:xfrm>
-            <a:off x="603504" y="411480"/>
-            <a:ext cx="1874520" cy="932688"/>
-          </a:xfrm>
-          <a:prstGeom prst="roundRect">
-            <a:avLst>
-              <a:gd name="adj" fmla="val 7843"/>
-            </a:avLst>
-          </a:prstGeom>
-          <a:solidFill>
-            <a:srgbClr val="FFFFFF"/>
-          </a:solidFill>
-          <a:ln/>
-          <a:effectLst>
-            <a:outerShdw sx="100000" sy="100000" kx="0" ky="0" algn="bl" rotWithShape="0" blurRad="101600" dist="38100" dir="5400000">
-              <a:srgbClr val="000000">
-                <a:alpha val="35000"/>
-              </a:srgbClr>
-            </a:outerShdw>
-          </a:effectLst>
-        </p:spPr>
-      </p:sp>
       <p:pic>
         <p:nvPicPr>
-          <p:cNvPr id="3" name="Image 0" descr="/Users/pop7/Library/CloudStorage/OneDrive-MonsterConnectCo.,Ltd/Lecture/KOSEN69 - software-security/slides/pptx/assets/logo-small.png">    </p:cNvPr>
+          <p:cNvPr id="2" name="Image 0" descr="/Users/pop7/Library/CloudStorage/OneDrive-MonsterConnectCo.,Ltd/Lecture/KOSEN69 - software-security/slides/pptx/assets/logo-small.png">    </p:cNvPr>
           <p:cNvPicPr>
             <a:picLocks noChangeAspect="1"/>
           </p:cNvPicPr>
@@ -1276,8 +1247,8 @@
         </p:blipFill>
         <p:spPr>
           <a:xfrm>
-            <a:off x="758952" y="566928"/>
-            <a:ext cx="1563624" cy="621792"/>
+            <a:off x="640080" y="502920"/>
+            <a:ext cx="1691640" cy="676656"/>
           </a:xfrm>
           <a:prstGeom prst="rect">
             <a:avLst/>
@@ -1286,7 +1257,7 @@
       </p:pic>
       <p:sp>
         <p:nvSpPr>
-          <p:cNvPr id="4" name="Text 1"/>
+          <p:cNvPr id="3" name="Text 0"/>
           <p:cNvSpPr/>
           <p:nvPr/>
         </p:nvSpPr>
@@ -1325,7 +1296,7 @@
       </p:sp>
       <p:sp>
         <p:nvSpPr>
-          <p:cNvPr id="5" name="Text 2"/>
+          <p:cNvPr id="4" name="Text 1"/>
           <p:cNvSpPr/>
           <p:nvPr/>
         </p:nvSpPr>
@@ -1353,7 +1324,7 @@
             <a:r>
               <a:rPr lang="en-US" sz="4000" b="1" dirty="0">
                 <a:solidFill>
-                  <a:srgbClr val="E6EDF3"/>
+                  <a:srgbClr val="1F2937"/>
                 </a:solidFill>
                 <a:latin typeface="Arial" pitchFamily="34" charset="0"/>
                 <a:ea typeface="Arial" pitchFamily="34" charset="-122"/>
@@ -1367,7 +1338,7 @@
       </p:sp>
       <p:sp>
         <p:nvSpPr>
-          <p:cNvPr id="6" name="Text 3"/>
+          <p:cNvPr id="5" name="Text 2"/>
           <p:cNvSpPr/>
           <p:nvPr/>
         </p:nvSpPr>
@@ -1392,7 +1363,7 @@
             <a:r>
               <a:rPr lang="en-US" sz="1400" dirty="0">
                 <a:solidFill>
-                  <a:srgbClr val="94A3B8"/>
+                  <a:srgbClr val="64748B"/>
                 </a:solidFill>
                 <a:latin typeface="Calibri" pitchFamily="34" charset="0"/>
                 <a:ea typeface="Calibri" pitchFamily="34" charset="-122"/>
@@ -1418,7 +1389,7 @@
     <p:bg>
       <p:bgPr>
         <a:solidFill>
-          <a:srgbClr val="0E1726"/>
+          <a:srgbClr val="FFFFFF"/>
         </a:solidFill>
       </p:bgPr>
     </p:bg>
@@ -1455,9 +1426,9 @@
           </a:solidFill>
           <a:ln/>
           <a:effectLst>
-            <a:outerShdw sx="100000" sy="100000" kx="0" ky="0" algn="bl" rotWithShape="0" blurRad="101600" dist="38100" dir="5400000">
+            <a:outerShdw sx="100000" sy="100000" kx="0" ky="0" algn="bl" rotWithShape="0" blurRad="76200" dist="25400" dir="5400000">
               <a:srgbClr val="000000">
-                <a:alpha val="35000"/>
+                <a:alpha val="12000"/>
               </a:srgbClr>
             </a:outerShdw>
           </a:effectLst>
@@ -1514,7 +1485,7 @@
             <a:r>
               <a:rPr lang="en-US" sz="2600" b="1" dirty="0">
                 <a:solidFill>
-                  <a:srgbClr val="E6EDF3"/>
+                  <a:srgbClr val="1F2937"/>
                 </a:solidFill>
                 <a:latin typeface="Arial" pitchFamily="34" charset="0"/>
                 <a:ea typeface="Arial" pitchFamily="34" charset="-122"/>
@@ -1543,13 +1514,13 @@
             </a:avLst>
           </a:prstGeom>
           <a:solidFill>
-            <a:srgbClr val="18243A"/>
+            <a:srgbClr val="F1F5F9"/>
           </a:solidFill>
           <a:ln/>
           <a:effectLst>
-            <a:outerShdw sx="100000" sy="100000" kx="0" ky="0" algn="bl" rotWithShape="0" blurRad="101600" dist="38100" dir="5400000">
+            <a:outerShdw sx="100000" sy="100000" kx="0" ky="0" algn="bl" rotWithShape="0" blurRad="76200" dist="25400" dir="5400000">
               <a:srgbClr val="000000">
-                <a:alpha val="35000"/>
+                <a:alpha val="12000"/>
               </a:srgbClr>
             </a:outerShdw>
           </a:effectLst>
@@ -1586,7 +1557,7 @@
             <a:r>
               <a:rPr lang="en-US" sz="1400" dirty="0">
                 <a:solidFill>
-                  <a:srgbClr val="E6EDF3"/>
+                  <a:srgbClr val="1F2937"/>
                 </a:solidFill>
                 <a:latin typeface="Calibri" pitchFamily="34" charset="0"/>
                 <a:ea typeface="Calibri" pitchFamily="34" charset="-122"/>
@@ -1607,7 +1578,7 @@
             <a:r>
               <a:rPr lang="en-US" sz="1400" dirty="0">
                 <a:solidFill>
-                  <a:srgbClr val="E6EDF3"/>
+                  <a:srgbClr val="1F2937"/>
                 </a:solidFill>
                 <a:latin typeface="Calibri" pitchFamily="34" charset="0"/>
                 <a:ea typeface="Calibri" pitchFamily="34" charset="-122"/>
@@ -1628,7 +1599,7 @@
             <a:r>
               <a:rPr lang="en-US" sz="1400" dirty="0">
                 <a:solidFill>
-                  <a:srgbClr val="E6EDF3"/>
+                  <a:srgbClr val="1F2937"/>
                 </a:solidFill>
                 <a:latin typeface="Calibri" pitchFamily="34" charset="0"/>
                 <a:ea typeface="Calibri" pitchFamily="34" charset="-122"/>
@@ -1667,7 +1638,7 @@
             <a:r>
               <a:rPr lang="en-US" sz="900" dirty="0">
                 <a:solidFill>
-                  <a:srgbClr val="94A3B8"/>
+                  <a:srgbClr val="64748B"/>
                 </a:solidFill>
                 <a:latin typeface="Calibri" pitchFamily="34" charset="0"/>
                 <a:ea typeface="Calibri" pitchFamily="34" charset="-122"/>
@@ -1679,38 +1650,9 @@
           </a:p>
         </p:txBody>
       </p:sp>
-      <p:sp>
-        <p:nvSpPr>
-          <p:cNvPr id="8" name="Shape 5"/>
-          <p:cNvSpPr/>
-          <p:nvPr/>
-        </p:nvSpPr>
-        <p:spPr>
-          <a:xfrm>
-            <a:off x="7772400" y="4590288"/>
-            <a:ext cx="969264" cy="475488"/>
-          </a:xfrm>
-          <a:prstGeom prst="roundRect">
-            <a:avLst>
-              <a:gd name="adj" fmla="val 11538"/>
-            </a:avLst>
-          </a:prstGeom>
-          <a:solidFill>
-            <a:srgbClr val="FFFFFF"/>
-          </a:solidFill>
-          <a:ln/>
-          <a:effectLst>
-            <a:outerShdw sx="100000" sy="100000" kx="0" ky="0" algn="bl" rotWithShape="0" blurRad="101600" dist="38100" dir="5400000">
-              <a:srgbClr val="000000">
-                <a:alpha val="35000"/>
-              </a:srgbClr>
-            </a:outerShdw>
-          </a:effectLst>
-        </p:spPr>
-      </p:sp>
       <p:pic>
         <p:nvPicPr>
-          <p:cNvPr id="9" name="Image 1" descr="/Users/pop7/Library/CloudStorage/OneDrive-MonsterConnectCo.,Ltd/Lecture/KOSEN69 - software-security/slides/pptx/assets/logo-small.png">    </p:cNvPr>
+          <p:cNvPr id="8" name="Image 1" descr="/Users/pop7/Library/CloudStorage/OneDrive-MonsterConnectCo.,Ltd/Lecture/KOSEN69 - software-security/slides/pptx/assets/logo-small.png">    </p:cNvPr>
           <p:cNvPicPr>
             <a:picLocks noChangeAspect="1"/>
           </p:cNvPicPr>
@@ -1724,7 +1666,7 @@
         </p:blipFill>
         <p:spPr>
           <a:xfrm>
-            <a:off x="7872984" y="4681728"/>
+            <a:off x="7882128" y="4700016"/>
             <a:ext cx="768096" cy="356616"/>
           </a:xfrm>
           <a:prstGeom prst="rect">
@@ -1746,7 +1688,7 @@
     <p:bg>
       <p:bgPr>
         <a:solidFill>
-          <a:srgbClr val="0E1726"/>
+          <a:srgbClr val="FFFFFF"/>
         </a:solidFill>
       </p:bgPr>
     </p:bg>
@@ -1783,9 +1725,9 @@
           </a:solidFill>
           <a:ln/>
           <a:effectLst>
-            <a:outerShdw sx="100000" sy="100000" kx="0" ky="0" algn="bl" rotWithShape="0" blurRad="101600" dist="38100" dir="5400000">
+            <a:outerShdw sx="100000" sy="100000" kx="0" ky="0" algn="bl" rotWithShape="0" blurRad="76200" dist="25400" dir="5400000">
               <a:srgbClr val="000000">
-                <a:alpha val="35000"/>
+                <a:alpha val="12000"/>
               </a:srgbClr>
             </a:outerShdw>
           </a:effectLst>
@@ -1842,7 +1784,7 @@
             <a:r>
               <a:rPr lang="en-US" sz="2600" b="1" dirty="0">
                 <a:solidFill>
-                  <a:srgbClr val="E6EDF3"/>
+                  <a:srgbClr val="1F2937"/>
                 </a:solidFill>
                 <a:latin typeface="Arial" pitchFamily="34" charset="0"/>
                 <a:ea typeface="Arial" pitchFamily="34" charset="-122"/>
@@ -1871,13 +1813,13 @@
             </a:avLst>
           </a:prstGeom>
           <a:solidFill>
-            <a:srgbClr val="18243A"/>
+            <a:srgbClr val="F1F5F9"/>
           </a:solidFill>
           <a:ln/>
           <a:effectLst>
-            <a:outerShdw sx="100000" sy="100000" kx="0" ky="0" algn="bl" rotWithShape="0" blurRad="101600" dist="38100" dir="5400000">
+            <a:outerShdw sx="100000" sy="100000" kx="0" ky="0" algn="bl" rotWithShape="0" blurRad="76200" dist="25400" dir="5400000">
               <a:srgbClr val="000000">
-                <a:alpha val="35000"/>
+                <a:alpha val="12000"/>
               </a:srgbClr>
             </a:outerShdw>
           </a:effectLst>
@@ -1914,7 +1856,7 @@
             <a:r>
               <a:rPr lang="en-US" sz="1400" dirty="0">
                 <a:solidFill>
-                  <a:srgbClr val="E6EDF3"/>
+                  <a:srgbClr val="1F2937"/>
                 </a:solidFill>
                 <a:latin typeface="Calibri" pitchFamily="34" charset="0"/>
                 <a:ea typeface="Calibri" pitchFamily="34" charset="-122"/>
@@ -1935,7 +1877,7 @@
             <a:r>
               <a:rPr lang="en-US" sz="1400" dirty="0">
                 <a:solidFill>
-                  <a:srgbClr val="E6EDF3"/>
+                  <a:srgbClr val="1F2937"/>
                 </a:solidFill>
                 <a:latin typeface="Calibri" pitchFamily="34" charset="0"/>
                 <a:ea typeface="Calibri" pitchFamily="34" charset="-122"/>
@@ -1956,7 +1898,7 @@
             <a:r>
               <a:rPr lang="en-US" sz="1400" dirty="0">
                 <a:solidFill>
-                  <a:srgbClr val="E6EDF3"/>
+                  <a:srgbClr val="1F2937"/>
                 </a:solidFill>
                 <a:latin typeface="Calibri" pitchFamily="34" charset="0"/>
                 <a:ea typeface="Calibri" pitchFamily="34" charset="-122"/>
@@ -1977,7 +1919,7 @@
             <a:r>
               <a:rPr lang="en-US" sz="1400" dirty="0">
                 <a:solidFill>
-                  <a:srgbClr val="E6EDF3"/>
+                  <a:srgbClr val="1F2937"/>
                 </a:solidFill>
                 <a:latin typeface="Calibri" pitchFamily="34" charset="0"/>
                 <a:ea typeface="Calibri" pitchFamily="34" charset="-122"/>
@@ -2016,7 +1958,7 @@
             <a:r>
               <a:rPr lang="en-US" sz="900" dirty="0">
                 <a:solidFill>
-                  <a:srgbClr val="94A3B8"/>
+                  <a:srgbClr val="64748B"/>
                 </a:solidFill>
                 <a:latin typeface="Calibri" pitchFamily="34" charset="0"/>
                 <a:ea typeface="Calibri" pitchFamily="34" charset="-122"/>
@@ -2028,38 +1970,9 @@
           </a:p>
         </p:txBody>
       </p:sp>
-      <p:sp>
-        <p:nvSpPr>
-          <p:cNvPr id="8" name="Shape 5"/>
-          <p:cNvSpPr/>
-          <p:nvPr/>
-        </p:nvSpPr>
-        <p:spPr>
-          <a:xfrm>
-            <a:off x="7772400" y="4590288"/>
-            <a:ext cx="969264" cy="475488"/>
-          </a:xfrm>
-          <a:prstGeom prst="roundRect">
-            <a:avLst>
-              <a:gd name="adj" fmla="val 11538"/>
-            </a:avLst>
-          </a:prstGeom>
-          <a:solidFill>
-            <a:srgbClr val="FFFFFF"/>
-          </a:solidFill>
-          <a:ln/>
-          <a:effectLst>
-            <a:outerShdw sx="100000" sy="100000" kx="0" ky="0" algn="bl" rotWithShape="0" blurRad="101600" dist="38100" dir="5400000">
-              <a:srgbClr val="000000">
-                <a:alpha val="35000"/>
-              </a:srgbClr>
-            </a:outerShdw>
-          </a:effectLst>
-        </p:spPr>
-      </p:sp>
       <p:pic>
         <p:nvPicPr>
-          <p:cNvPr id="9" name="Image 1" descr="/Users/pop7/Library/CloudStorage/OneDrive-MonsterConnectCo.,Ltd/Lecture/KOSEN69 - software-security/slides/pptx/assets/logo-small.png">    </p:cNvPr>
+          <p:cNvPr id="8" name="Image 1" descr="/Users/pop7/Library/CloudStorage/OneDrive-MonsterConnectCo.,Ltd/Lecture/KOSEN69 - software-security/slides/pptx/assets/logo-small.png">    </p:cNvPr>
           <p:cNvPicPr>
             <a:picLocks noChangeAspect="1"/>
           </p:cNvPicPr>
@@ -2073,7 +1986,7 @@
         </p:blipFill>
         <p:spPr>
           <a:xfrm>
-            <a:off x="7872984" y="4681728"/>
+            <a:off x="7882128" y="4700016"/>
             <a:ext cx="768096" cy="356616"/>
           </a:xfrm>
           <a:prstGeom prst="rect">
@@ -2095,7 +2008,7 @@
     <p:bg>
       <p:bgPr>
         <a:solidFill>
-          <a:srgbClr val="0E1726"/>
+          <a:srgbClr val="FFFFFF"/>
         </a:solidFill>
       </p:bgPr>
     </p:bg>
@@ -2132,9 +2045,9 @@
           </a:solidFill>
           <a:ln/>
           <a:effectLst>
-            <a:outerShdw sx="100000" sy="100000" kx="0" ky="0" algn="bl" rotWithShape="0" blurRad="101600" dist="38100" dir="5400000">
+            <a:outerShdw sx="100000" sy="100000" kx="0" ky="0" algn="bl" rotWithShape="0" blurRad="76200" dist="25400" dir="5400000">
               <a:srgbClr val="000000">
-                <a:alpha val="35000"/>
+                <a:alpha val="12000"/>
               </a:srgbClr>
             </a:outerShdw>
           </a:effectLst>
@@ -2191,7 +2104,7 @@
             <a:r>
               <a:rPr lang="en-US" sz="2600" b="1" dirty="0">
                 <a:solidFill>
-                  <a:srgbClr val="E6EDF3"/>
+                  <a:srgbClr val="1F2937"/>
                 </a:solidFill>
                 <a:latin typeface="Arial" pitchFamily="34" charset="0"/>
                 <a:ea typeface="Arial" pitchFamily="34" charset="-122"/>
@@ -2220,13 +2133,13 @@
             </a:avLst>
           </a:prstGeom>
           <a:solidFill>
-            <a:srgbClr val="18243A"/>
+            <a:srgbClr val="F1F5F9"/>
           </a:solidFill>
           <a:ln/>
           <a:effectLst>
-            <a:outerShdw sx="100000" sy="100000" kx="0" ky="0" algn="bl" rotWithShape="0" blurRad="101600" dist="38100" dir="5400000">
+            <a:outerShdw sx="100000" sy="100000" kx="0" ky="0" algn="bl" rotWithShape="0" blurRad="76200" dist="25400" dir="5400000">
               <a:srgbClr val="000000">
-                <a:alpha val="35000"/>
+                <a:alpha val="12000"/>
               </a:srgbClr>
             </a:outerShdw>
           </a:effectLst>
@@ -2263,7 +2176,7 @@
             <a:r>
               <a:rPr lang="en-US" sz="1400" dirty="0">
                 <a:solidFill>
-                  <a:srgbClr val="E6EDF3"/>
+                  <a:srgbClr val="1F2937"/>
                 </a:solidFill>
                 <a:latin typeface="Calibri" pitchFamily="34" charset="0"/>
                 <a:ea typeface="Calibri" pitchFamily="34" charset="-122"/>
@@ -2284,7 +2197,7 @@
             <a:r>
               <a:rPr lang="en-US" sz="1400" dirty="0">
                 <a:solidFill>
-                  <a:srgbClr val="E6EDF3"/>
+                  <a:srgbClr val="1F2937"/>
                 </a:solidFill>
                 <a:latin typeface="Calibri" pitchFamily="34" charset="0"/>
                 <a:ea typeface="Calibri" pitchFamily="34" charset="-122"/>
@@ -2305,7 +2218,7 @@
             <a:r>
               <a:rPr lang="en-US" sz="1400" dirty="0">
                 <a:solidFill>
-                  <a:srgbClr val="E6EDF3"/>
+                  <a:srgbClr val="1F2937"/>
                 </a:solidFill>
                 <a:latin typeface="Calibri" pitchFamily="34" charset="0"/>
                 <a:ea typeface="Calibri" pitchFamily="34" charset="-122"/>
@@ -2344,7 +2257,7 @@
             <a:r>
               <a:rPr lang="en-US" sz="900" dirty="0">
                 <a:solidFill>
-                  <a:srgbClr val="94A3B8"/>
+                  <a:srgbClr val="64748B"/>
                 </a:solidFill>
                 <a:latin typeface="Calibri" pitchFamily="34" charset="0"/>
                 <a:ea typeface="Calibri" pitchFamily="34" charset="-122"/>
@@ -2356,38 +2269,9 @@
           </a:p>
         </p:txBody>
       </p:sp>
-      <p:sp>
-        <p:nvSpPr>
-          <p:cNvPr id="8" name="Shape 5"/>
-          <p:cNvSpPr/>
-          <p:nvPr/>
-        </p:nvSpPr>
-        <p:spPr>
-          <a:xfrm>
-            <a:off x="7772400" y="4590288"/>
-            <a:ext cx="969264" cy="475488"/>
-          </a:xfrm>
-          <a:prstGeom prst="roundRect">
-            <a:avLst>
-              <a:gd name="adj" fmla="val 11538"/>
-            </a:avLst>
-          </a:prstGeom>
-          <a:solidFill>
-            <a:srgbClr val="FFFFFF"/>
-          </a:solidFill>
-          <a:ln/>
-          <a:effectLst>
-            <a:outerShdw sx="100000" sy="100000" kx="0" ky="0" algn="bl" rotWithShape="0" blurRad="101600" dist="38100" dir="5400000">
-              <a:srgbClr val="000000">
-                <a:alpha val="35000"/>
-              </a:srgbClr>
-            </a:outerShdw>
-          </a:effectLst>
-        </p:spPr>
-      </p:sp>
       <p:pic>
         <p:nvPicPr>
-          <p:cNvPr id="9" name="Image 1" descr="/Users/pop7/Library/CloudStorage/OneDrive-MonsterConnectCo.,Ltd/Lecture/KOSEN69 - software-security/slides/pptx/assets/logo-small.png">    </p:cNvPr>
+          <p:cNvPr id="8" name="Image 1" descr="/Users/pop7/Library/CloudStorage/OneDrive-MonsterConnectCo.,Ltd/Lecture/KOSEN69 - software-security/slides/pptx/assets/logo-small.png">    </p:cNvPr>
           <p:cNvPicPr>
             <a:picLocks noChangeAspect="1"/>
           </p:cNvPicPr>
@@ -2401,7 +2285,7 @@
         </p:blipFill>
         <p:spPr>
           <a:xfrm>
-            <a:off x="7872984" y="4681728"/>
+            <a:off x="7882128" y="4700016"/>
             <a:ext cx="768096" cy="356616"/>
           </a:xfrm>
           <a:prstGeom prst="rect">
@@ -2423,7 +2307,7 @@
     <p:bg>
       <p:bgPr>
         <a:solidFill>
-          <a:srgbClr val="0E1726"/>
+          <a:srgbClr val="FFFFFF"/>
         </a:solidFill>
       </p:bgPr>
     </p:bg>
@@ -2468,7 +2352,7 @@
             <a:r>
               <a:rPr lang="en-US" sz="4600" b="1" dirty="0">
                 <a:solidFill>
-                  <a:srgbClr val="E6EDF3"/>
+                  <a:srgbClr val="1F2937"/>
                 </a:solidFill>
                 <a:latin typeface="Arial" pitchFamily="34" charset="0"/>
                 <a:ea typeface="Arial" pitchFamily="34" charset="-122"/>
@@ -2519,38 +2403,9 @@
           </a:p>
         </p:txBody>
       </p:sp>
-      <p:sp>
-        <p:nvSpPr>
-          <p:cNvPr id="4" name="Shape 2"/>
-          <p:cNvSpPr/>
-          <p:nvPr/>
-        </p:nvSpPr>
-        <p:spPr>
-          <a:xfrm>
-            <a:off x="7772400" y="4590288"/>
-            <a:ext cx="969264" cy="475488"/>
-          </a:xfrm>
-          <a:prstGeom prst="roundRect">
-            <a:avLst>
-              <a:gd name="adj" fmla="val 11538"/>
-            </a:avLst>
-          </a:prstGeom>
-          <a:solidFill>
-            <a:srgbClr val="FFFFFF"/>
-          </a:solidFill>
-          <a:ln/>
-          <a:effectLst>
-            <a:outerShdw sx="100000" sy="100000" kx="0" ky="0" algn="bl" rotWithShape="0" blurRad="101600" dist="38100" dir="5400000">
-              <a:srgbClr val="000000">
-                <a:alpha val="35000"/>
-              </a:srgbClr>
-            </a:outerShdw>
-          </a:effectLst>
-        </p:spPr>
-      </p:sp>
       <p:pic>
         <p:nvPicPr>
-          <p:cNvPr id="5" name="Image 0" descr="/Users/pop7/Library/CloudStorage/OneDrive-MonsterConnectCo.,Ltd/Lecture/KOSEN69 - software-security/slides/pptx/assets/logo-small.png">    </p:cNvPr>
+          <p:cNvPr id="4" name="Image 0" descr="/Users/pop7/Library/CloudStorage/OneDrive-MonsterConnectCo.,Ltd/Lecture/KOSEN69 - software-security/slides/pptx/assets/logo-small.png">    </p:cNvPr>
           <p:cNvPicPr>
             <a:picLocks noChangeAspect="1"/>
           </p:cNvPicPr>
@@ -2564,7 +2419,7 @@
         </p:blipFill>
         <p:spPr>
           <a:xfrm>
-            <a:off x="7872984" y="4681728"/>
+            <a:off x="7882128" y="4700016"/>
             <a:ext cx="768096" cy="356616"/>
           </a:xfrm>
           <a:prstGeom prst="rect">

--- a/slides/pptx/week09.pptx
+++ b/slides/pptx/week09.pptx
@@ -506,7 +506,7 @@
           <a:p>
             <a:r>
               <a:rPr lang="en-US" dirty="0"/>
-              <a:t/>
+              <a:t>Proctor deck. BEFORE class: plant per-student flags (seed_flags.py + the flag-planting notes in exams/week09-…-answers.md), bring up the targets, open CTFd. Confirm everyone's VM/Docker works in the first 5 min.</a:t>
             </a:r>
             <a:endParaRPr lang="en-US" dirty="0"/>
           </a:p>
@@ -594,7 +594,7 @@
           <a:p>
             <a:r>
               <a:rPr lang="en-US" dirty="0"/>
-              <a:t/>
+              <a:t>State the time (150 min) + that flags are per-student (copying is traceable via seed_flags.py verify). Submit via CTFd or the Form. ~2 min.</a:t>
             </a:r>
             <a:endParaRPr lang="en-US" dirty="0"/>
           </a:p>
@@ -682,7 +682,7 @@
           <a:p>
             <a:r>
               <a:rPr lang="en-US" dirty="0"/>
-              <a:t/>
+              <a:t>Same areas as the W7 mock — no surprises. Extra challenges available in exams/item-bank.md (CTF pool) if you rotate.</a:t>
             </a:r>
             <a:endParaRPr lang="en-US" dirty="0"/>
           </a:p>
@@ -770,7 +770,7 @@
           <a:p>
             <a:r>
               <a:rPr lang="en-US" dirty="0"/>
-              <a:t/>
+              <a:t>Stress: attack only provided targets; per-challenge submit flag + 1-line method + mitigation (the method note earns partial credit + supports grading). Then start the clock.</a:t>
             </a:r>
             <a:endParaRPr lang="en-US" dirty="0"/>
           </a:p>
@@ -858,7 +858,7 @@
           <a:p>
             <a:r>
               <a:rPr lang="en-US" dirty="0"/>
-              <a:t/>
+              <a:t>Close: collect submissions; grade with the answer key + seed_flags.py verify for copied flags. Preview W10 (APIs).</a:t>
             </a:r>
             <a:endParaRPr lang="en-US" dirty="0"/>
           </a:p>
